--- a/禱告的力量.pptx
+++ b/禱告的力量.pptx
@@ -2,7 +2,7 @@
 <file path=ppt/presentation.xml><?xml version="1.0" encoding="utf-8"?>
 <p:presentation xmlns:a="http://schemas.openxmlformats.org/drawingml/2006/main" xmlns:r="http://schemas.openxmlformats.org/officeDocument/2006/relationships" xmlns:p="http://schemas.openxmlformats.org/presentationml/2006/main" saveSubsetFonts="1">
   <p:sldMasterIdLst>
-    <p:sldMasterId id="2147483648" r:id="rId1"/>
+    <p:sldMasterId id="2147483660" r:id="rId1"/>
   </p:sldMasterIdLst>
   <p:sldIdLst>
     <p:sldId id="257" r:id="rId2"/>
@@ -108,6 +108,22 @@
       </a:defRPr>
     </a:lvl9pPr>
   </p:defaultTextStyle>
+  <p:extLst>
+    <p:ext uri="{EFAFB233-063F-42B5-8137-9DF3F51BA10A}">
+      <p15:sldGuideLst xmlns:p15="http://schemas.microsoft.com/office/powerpoint/2012/main">
+        <p15:guide id="1" orient="horz" pos="1620">
+          <p15:clr>
+            <a:srgbClr val="A4A3A4"/>
+          </p15:clr>
+        </p15:guide>
+        <p15:guide id="2" pos="2880">
+          <p15:clr>
+            <a:srgbClr val="A4A3A4"/>
+          </p15:clr>
+        </p15:guide>
+      </p15:sldGuideLst>
+    </p:ext>
+  </p:extLst>
 </p:presentation>
 </file>
 
@@ -140,7 +156,7 @@
         </p:nvSpPr>
         <p:spPr>
           <a:xfrm>
-            <a:off x="685800" y="1597819"/>
+            <a:off x="685800" y="1597820"/>
             <a:ext cx="7772400" cy="1102519"/>
           </a:xfrm>
         </p:spPr>
@@ -149,8 +165,8 @@
           <a:lstStyle/>
           <a:p>
             <a:r>
-              <a:rPr lang="zh-TW" altLang="en-US" smtClean="0"/>
-              <a:t>按一下以編輯母片標題樣式</a:t>
+              <a:rPr lang="en-US" altLang="zh-TW"/>
+              <a:t>Click to edit Master title style</a:t>
             </a:r>
             <a:endParaRPr lang="zh-TW" altLang="en-US"/>
           </a:p>
@@ -268,8 +284,8 @@
           </a:lstStyle>
           <a:p>
             <a:r>
-              <a:rPr lang="zh-TW" altLang="en-US" smtClean="0"/>
-              <a:t>按一下以編輯母片副標題樣式</a:t>
+              <a:rPr lang="en-US" altLang="zh-TW"/>
+              <a:t>Click to edit Master subtitle style</a:t>
             </a:r>
             <a:endParaRPr lang="zh-TW" altLang="en-US"/>
           </a:p>
@@ -292,7 +308,7 @@
           <a:p>
             <a:fld id="{02ECE8F2-C913-4DF4-A996-09101B912AAC}" type="datetimeFigureOut">
               <a:rPr lang="zh-TW" altLang="en-US" smtClean="0"/>
-              <a:t>2023/7/6</a:t>
+              <a:t>2026/7/18</a:t>
             </a:fld>
             <a:endParaRPr lang="zh-TW" altLang="en-US"/>
           </a:p>
@@ -341,6 +357,11 @@
         </p:txBody>
       </p:sp>
     </p:spTree>
+    <p:extLst>
+      <p:ext uri="{BB962C8B-B14F-4D97-AF65-F5344CB8AC3E}">
+        <p14:creationId xmlns:p14="http://schemas.microsoft.com/office/powerpoint/2010/main" val="4109136541"/>
+      </p:ext>
+    </p:extLst>
   </p:cSld>
   <p:clrMapOvr>
     <a:masterClrMapping/>
@@ -381,8 +402,8 @@
           <a:lstStyle/>
           <a:p>
             <a:r>
-              <a:rPr lang="zh-TW" altLang="en-US" smtClean="0"/>
-              <a:t>按一下以編輯母片標題樣式</a:t>
+              <a:rPr lang="en-US" altLang="zh-TW"/>
+              <a:t>Click to edit Master title style</a:t>
             </a:r>
             <a:endParaRPr lang="zh-TW" altLang="en-US"/>
           </a:p>
@@ -405,36 +426,36 @@
           <a:p>
             <a:pPr lvl="0"/>
             <a:r>
-              <a:rPr lang="zh-TW" altLang="en-US" smtClean="0"/>
-              <a:t>按一下以編輯母片文字樣式</a:t>
+              <a:rPr lang="en-US" altLang="zh-TW"/>
+              <a:t>Click to edit Master text styles</a:t>
             </a:r>
           </a:p>
           <a:p>
             <a:pPr lvl="1"/>
             <a:r>
-              <a:rPr lang="zh-TW" altLang="en-US" smtClean="0"/>
-              <a:t>第二層</a:t>
+              <a:rPr lang="en-US" altLang="zh-TW"/>
+              <a:t>Second level</a:t>
             </a:r>
           </a:p>
           <a:p>
             <a:pPr lvl="2"/>
             <a:r>
-              <a:rPr lang="zh-TW" altLang="en-US" smtClean="0"/>
-              <a:t>第三層</a:t>
+              <a:rPr lang="en-US" altLang="zh-TW"/>
+              <a:t>Third level</a:t>
             </a:r>
           </a:p>
           <a:p>
             <a:pPr lvl="3"/>
             <a:r>
-              <a:rPr lang="zh-TW" altLang="en-US" smtClean="0"/>
-              <a:t>第四層</a:t>
+              <a:rPr lang="en-US" altLang="zh-TW"/>
+              <a:t>Fourth level</a:t>
             </a:r>
           </a:p>
           <a:p>
             <a:pPr lvl="4"/>
             <a:r>
-              <a:rPr lang="zh-TW" altLang="en-US" smtClean="0"/>
-              <a:t>第五層</a:t>
+              <a:rPr lang="en-US" altLang="zh-TW"/>
+              <a:t>Fifth level</a:t>
             </a:r>
             <a:endParaRPr lang="zh-TW" altLang="en-US"/>
           </a:p>
@@ -457,7 +478,7 @@
           <a:p>
             <a:fld id="{02ECE8F2-C913-4DF4-A996-09101B912AAC}" type="datetimeFigureOut">
               <a:rPr lang="zh-TW" altLang="en-US" smtClean="0"/>
-              <a:t>2023/7/6</a:t>
+              <a:t>2026/7/18</a:t>
             </a:fld>
             <a:endParaRPr lang="zh-TW" altLang="en-US"/>
           </a:p>
@@ -506,6 +527,11 @@
         </p:txBody>
       </p:sp>
     </p:spTree>
+    <p:extLst>
+      <p:ext uri="{BB962C8B-B14F-4D97-AF65-F5344CB8AC3E}">
+        <p14:creationId xmlns:p14="http://schemas.microsoft.com/office/powerpoint/2010/main" val="2344673164"/>
+      </p:ext>
+    </p:extLst>
   </p:cSld>
   <p:clrMapOvr>
     <a:masterClrMapping/>
@@ -542,8 +568,8 @@
         </p:nvSpPr>
         <p:spPr>
           <a:xfrm>
-            <a:off x="6629400" y="154781"/>
-            <a:ext cx="2057400" cy="3290888"/>
+            <a:off x="6629400" y="205979"/>
+            <a:ext cx="2057400" cy="4388644"/>
           </a:xfrm>
         </p:spPr>
         <p:txBody>
@@ -551,8 +577,8 @@
           <a:lstStyle/>
           <a:p>
             <a:r>
-              <a:rPr lang="zh-TW" altLang="en-US" smtClean="0"/>
-              <a:t>按一下以編輯母片標題樣式</a:t>
+              <a:rPr lang="en-US" altLang="zh-TW"/>
+              <a:t>Click to edit Master title style</a:t>
             </a:r>
             <a:endParaRPr lang="zh-TW" altLang="en-US"/>
           </a:p>
@@ -570,8 +596,8 @@
         </p:nvSpPr>
         <p:spPr>
           <a:xfrm>
-            <a:off x="457200" y="154781"/>
-            <a:ext cx="6019800" cy="3290888"/>
+            <a:off x="457200" y="205979"/>
+            <a:ext cx="6019800" cy="4388644"/>
           </a:xfrm>
         </p:spPr>
         <p:txBody>
@@ -580,36 +606,36 @@
           <a:p>
             <a:pPr lvl="0"/>
             <a:r>
-              <a:rPr lang="zh-TW" altLang="en-US" smtClean="0"/>
-              <a:t>按一下以編輯母片文字樣式</a:t>
+              <a:rPr lang="en-US" altLang="zh-TW"/>
+              <a:t>Click to edit Master text styles</a:t>
             </a:r>
           </a:p>
           <a:p>
             <a:pPr lvl="1"/>
             <a:r>
-              <a:rPr lang="zh-TW" altLang="en-US" smtClean="0"/>
-              <a:t>第二層</a:t>
+              <a:rPr lang="en-US" altLang="zh-TW"/>
+              <a:t>Second level</a:t>
             </a:r>
           </a:p>
           <a:p>
             <a:pPr lvl="2"/>
             <a:r>
-              <a:rPr lang="zh-TW" altLang="en-US" smtClean="0"/>
-              <a:t>第三層</a:t>
+              <a:rPr lang="en-US" altLang="zh-TW"/>
+              <a:t>Third level</a:t>
             </a:r>
           </a:p>
           <a:p>
             <a:pPr lvl="3"/>
             <a:r>
-              <a:rPr lang="zh-TW" altLang="en-US" smtClean="0"/>
-              <a:t>第四層</a:t>
+              <a:rPr lang="en-US" altLang="zh-TW"/>
+              <a:t>Fourth level</a:t>
             </a:r>
           </a:p>
           <a:p>
             <a:pPr lvl="4"/>
             <a:r>
-              <a:rPr lang="zh-TW" altLang="en-US" smtClean="0"/>
-              <a:t>第五層</a:t>
+              <a:rPr lang="en-US" altLang="zh-TW"/>
+              <a:t>Fifth level</a:t>
             </a:r>
             <a:endParaRPr lang="zh-TW" altLang="en-US"/>
           </a:p>
@@ -632,7 +658,7 @@
           <a:p>
             <a:fld id="{02ECE8F2-C913-4DF4-A996-09101B912AAC}" type="datetimeFigureOut">
               <a:rPr lang="zh-TW" altLang="en-US" smtClean="0"/>
-              <a:t>2023/7/6</a:t>
+              <a:t>2026/7/18</a:t>
             </a:fld>
             <a:endParaRPr lang="zh-TW" altLang="en-US"/>
           </a:p>
@@ -681,6 +707,11 @@
         </p:txBody>
       </p:sp>
     </p:spTree>
+    <p:extLst>
+      <p:ext uri="{BB962C8B-B14F-4D97-AF65-F5344CB8AC3E}">
+        <p14:creationId xmlns:p14="http://schemas.microsoft.com/office/powerpoint/2010/main" val="2217900220"/>
+      </p:ext>
+    </p:extLst>
   </p:cSld>
   <p:clrMapOvr>
     <a:masterClrMapping/>
@@ -721,8 +752,8 @@
           <a:lstStyle/>
           <a:p>
             <a:r>
-              <a:rPr lang="zh-TW" altLang="en-US" smtClean="0"/>
-              <a:t>按一下以編輯母片標題樣式</a:t>
+              <a:rPr lang="en-US" altLang="zh-TW"/>
+              <a:t>Click to edit Master title style</a:t>
             </a:r>
             <a:endParaRPr lang="zh-TW" altLang="en-US"/>
           </a:p>
@@ -745,36 +776,36 @@
           <a:p>
             <a:pPr lvl="0"/>
             <a:r>
-              <a:rPr lang="zh-TW" altLang="en-US" smtClean="0"/>
-              <a:t>按一下以編輯母片文字樣式</a:t>
+              <a:rPr lang="en-US" altLang="zh-TW"/>
+              <a:t>Click to edit Master text styles</a:t>
             </a:r>
           </a:p>
           <a:p>
             <a:pPr lvl="1"/>
             <a:r>
-              <a:rPr lang="zh-TW" altLang="en-US" smtClean="0"/>
-              <a:t>第二層</a:t>
+              <a:rPr lang="en-US" altLang="zh-TW"/>
+              <a:t>Second level</a:t>
             </a:r>
           </a:p>
           <a:p>
             <a:pPr lvl="2"/>
             <a:r>
-              <a:rPr lang="zh-TW" altLang="en-US" smtClean="0"/>
-              <a:t>第三層</a:t>
+              <a:rPr lang="en-US" altLang="zh-TW"/>
+              <a:t>Third level</a:t>
             </a:r>
           </a:p>
           <a:p>
             <a:pPr lvl="3"/>
             <a:r>
-              <a:rPr lang="zh-TW" altLang="en-US" smtClean="0"/>
-              <a:t>第四層</a:t>
+              <a:rPr lang="en-US" altLang="zh-TW"/>
+              <a:t>Fourth level</a:t>
             </a:r>
           </a:p>
           <a:p>
             <a:pPr lvl="4"/>
             <a:r>
-              <a:rPr lang="zh-TW" altLang="en-US" smtClean="0"/>
-              <a:t>第五層</a:t>
+              <a:rPr lang="en-US" altLang="zh-TW"/>
+              <a:t>Fifth level</a:t>
             </a:r>
             <a:endParaRPr lang="zh-TW" altLang="en-US"/>
           </a:p>
@@ -797,7 +828,7 @@
           <a:p>
             <a:fld id="{02ECE8F2-C913-4DF4-A996-09101B912AAC}" type="datetimeFigureOut">
               <a:rPr lang="zh-TW" altLang="en-US" smtClean="0"/>
-              <a:t>2023/7/6</a:t>
+              <a:t>2026/7/18</a:t>
             </a:fld>
             <a:endParaRPr lang="zh-TW" altLang="en-US"/>
           </a:p>
@@ -846,6 +877,11 @@
         </p:txBody>
       </p:sp>
     </p:spTree>
+    <p:extLst>
+      <p:ext uri="{BB962C8B-B14F-4D97-AF65-F5344CB8AC3E}">
+        <p14:creationId xmlns:p14="http://schemas.microsoft.com/office/powerpoint/2010/main" val="2246337885"/>
+      </p:ext>
+    </p:extLst>
   </p:cSld>
   <p:clrMapOvr>
     <a:masterClrMapping/>
@@ -895,8 +931,8 @@
           </a:lstStyle>
           <a:p>
             <a:r>
-              <a:rPr lang="zh-TW" altLang="en-US" smtClean="0"/>
-              <a:t>按一下以編輯母片標題樣式</a:t>
+              <a:rPr lang="en-US" altLang="zh-TW"/>
+              <a:t>Click to edit Master title style</a:t>
             </a:r>
             <a:endParaRPr lang="zh-TW" altLang="en-US"/>
           </a:p>
@@ -1015,8 +1051,8 @@
           <a:p>
             <a:pPr lvl="0"/>
             <a:r>
-              <a:rPr lang="zh-TW" altLang="en-US" smtClean="0"/>
-              <a:t>按一下以編輯母片文字樣式</a:t>
+              <a:rPr lang="en-US" altLang="zh-TW"/>
+              <a:t>Click to edit Master text styles</a:t>
             </a:r>
           </a:p>
         </p:txBody>
@@ -1038,7 +1074,7 @@
           <a:p>
             <a:fld id="{02ECE8F2-C913-4DF4-A996-09101B912AAC}" type="datetimeFigureOut">
               <a:rPr lang="zh-TW" altLang="en-US" smtClean="0"/>
-              <a:t>2023/7/6</a:t>
+              <a:t>2026/7/18</a:t>
             </a:fld>
             <a:endParaRPr lang="zh-TW" altLang="en-US"/>
           </a:p>
@@ -1087,6 +1123,11 @@
         </p:txBody>
       </p:sp>
     </p:spTree>
+    <p:extLst>
+      <p:ext uri="{BB962C8B-B14F-4D97-AF65-F5344CB8AC3E}">
+        <p14:creationId xmlns:p14="http://schemas.microsoft.com/office/powerpoint/2010/main" val="2866130777"/>
+      </p:ext>
+    </p:extLst>
   </p:cSld>
   <p:clrMapOvr>
     <a:masterClrMapping/>
@@ -1127,8 +1168,8 @@
           <a:lstStyle/>
           <a:p>
             <a:r>
-              <a:rPr lang="zh-TW" altLang="en-US" smtClean="0"/>
-              <a:t>按一下以編輯母片標題樣式</a:t>
+              <a:rPr lang="en-US" altLang="zh-TW"/>
+              <a:t>Click to edit Master title style</a:t>
             </a:r>
             <a:endParaRPr lang="zh-TW" altLang="en-US"/>
           </a:p>
@@ -1146,8 +1187,8 @@
         </p:nvSpPr>
         <p:spPr>
           <a:xfrm>
-            <a:off x="457200" y="900113"/>
-            <a:ext cx="4038600" cy="2545556"/>
+            <a:off x="457200" y="1200151"/>
+            <a:ext cx="4038600" cy="3394472"/>
           </a:xfrm>
         </p:spPr>
         <p:txBody>
@@ -1184,36 +1225,36 @@
           <a:p>
             <a:pPr lvl="0"/>
             <a:r>
-              <a:rPr lang="zh-TW" altLang="en-US" smtClean="0"/>
-              <a:t>按一下以編輯母片文字樣式</a:t>
+              <a:rPr lang="en-US" altLang="zh-TW"/>
+              <a:t>Click to edit Master text styles</a:t>
             </a:r>
           </a:p>
           <a:p>
             <a:pPr lvl="1"/>
             <a:r>
-              <a:rPr lang="zh-TW" altLang="en-US" smtClean="0"/>
-              <a:t>第二層</a:t>
+              <a:rPr lang="en-US" altLang="zh-TW"/>
+              <a:t>Second level</a:t>
             </a:r>
           </a:p>
           <a:p>
             <a:pPr lvl="2"/>
             <a:r>
-              <a:rPr lang="zh-TW" altLang="en-US" smtClean="0"/>
-              <a:t>第三層</a:t>
+              <a:rPr lang="en-US" altLang="zh-TW"/>
+              <a:t>Third level</a:t>
             </a:r>
           </a:p>
           <a:p>
             <a:pPr lvl="3"/>
             <a:r>
-              <a:rPr lang="zh-TW" altLang="en-US" smtClean="0"/>
-              <a:t>第四層</a:t>
+              <a:rPr lang="en-US" altLang="zh-TW"/>
+              <a:t>Fourth level</a:t>
             </a:r>
           </a:p>
           <a:p>
             <a:pPr lvl="4"/>
             <a:r>
-              <a:rPr lang="zh-TW" altLang="en-US" smtClean="0"/>
-              <a:t>第五層</a:t>
+              <a:rPr lang="en-US" altLang="zh-TW"/>
+              <a:t>Fifth level</a:t>
             </a:r>
             <a:endParaRPr lang="zh-TW" altLang="en-US"/>
           </a:p>
@@ -1231,8 +1272,8 @@
         </p:nvSpPr>
         <p:spPr>
           <a:xfrm>
-            <a:off x="4648200" y="900113"/>
-            <a:ext cx="4038600" cy="2545556"/>
+            <a:off x="4648200" y="1200151"/>
+            <a:ext cx="4038600" cy="3394472"/>
           </a:xfrm>
         </p:spPr>
         <p:txBody>
@@ -1269,36 +1310,36 @@
           <a:p>
             <a:pPr lvl="0"/>
             <a:r>
-              <a:rPr lang="zh-TW" altLang="en-US" smtClean="0"/>
-              <a:t>按一下以編輯母片文字樣式</a:t>
+              <a:rPr lang="en-US" altLang="zh-TW"/>
+              <a:t>Click to edit Master text styles</a:t>
             </a:r>
           </a:p>
           <a:p>
             <a:pPr lvl="1"/>
             <a:r>
-              <a:rPr lang="zh-TW" altLang="en-US" smtClean="0"/>
-              <a:t>第二層</a:t>
+              <a:rPr lang="en-US" altLang="zh-TW"/>
+              <a:t>Second level</a:t>
             </a:r>
           </a:p>
           <a:p>
             <a:pPr lvl="2"/>
             <a:r>
-              <a:rPr lang="zh-TW" altLang="en-US" smtClean="0"/>
-              <a:t>第三層</a:t>
+              <a:rPr lang="en-US" altLang="zh-TW"/>
+              <a:t>Third level</a:t>
             </a:r>
           </a:p>
           <a:p>
             <a:pPr lvl="3"/>
             <a:r>
-              <a:rPr lang="zh-TW" altLang="en-US" smtClean="0"/>
-              <a:t>第四層</a:t>
+              <a:rPr lang="en-US" altLang="zh-TW"/>
+              <a:t>Fourth level</a:t>
             </a:r>
           </a:p>
           <a:p>
             <a:pPr lvl="4"/>
             <a:r>
-              <a:rPr lang="zh-TW" altLang="en-US" smtClean="0"/>
-              <a:t>第五層</a:t>
+              <a:rPr lang="en-US" altLang="zh-TW"/>
+              <a:t>Fifth level</a:t>
             </a:r>
             <a:endParaRPr lang="zh-TW" altLang="en-US"/>
           </a:p>
@@ -1321,7 +1362,7 @@
           <a:p>
             <a:fld id="{02ECE8F2-C913-4DF4-A996-09101B912AAC}" type="datetimeFigureOut">
               <a:rPr lang="zh-TW" altLang="en-US" smtClean="0"/>
-              <a:t>2023/7/6</a:t>
+              <a:t>2026/7/18</a:t>
             </a:fld>
             <a:endParaRPr lang="zh-TW" altLang="en-US"/>
           </a:p>
@@ -1370,6 +1411,11 @@
         </p:txBody>
       </p:sp>
     </p:spTree>
+    <p:extLst>
+      <p:ext uri="{BB962C8B-B14F-4D97-AF65-F5344CB8AC3E}">
+        <p14:creationId xmlns:p14="http://schemas.microsoft.com/office/powerpoint/2010/main" val="1298647458"/>
+      </p:ext>
+    </p:extLst>
   </p:cSld>
   <p:clrMapOvr>
     <a:masterClrMapping/>
@@ -1404,12 +1450,7 @@
             <p:ph type="title"/>
           </p:nvPr>
         </p:nvSpPr>
-        <p:spPr>
-          <a:xfrm>
-            <a:off x="457200" y="205978"/>
-            <a:ext cx="8229600" cy="857250"/>
-          </a:xfrm>
-        </p:spPr>
+        <p:spPr/>
         <p:txBody>
           <a:bodyPr/>
           <a:lstStyle>
@@ -1419,8 +1460,8 @@
           </a:lstStyle>
           <a:p>
             <a:r>
-              <a:rPr lang="zh-TW" altLang="en-US" smtClean="0"/>
-              <a:t>按一下以編輯母片標題樣式</a:t>
+              <a:rPr lang="en-US" altLang="zh-TW"/>
+              <a:t>Click to edit Master title style</a:t>
             </a:r>
             <a:endParaRPr lang="zh-TW" altLang="en-US"/>
           </a:p>
@@ -1485,8 +1526,8 @@
           <a:p>
             <a:pPr lvl="0"/>
             <a:r>
-              <a:rPr lang="zh-TW" altLang="en-US" smtClean="0"/>
-              <a:t>按一下以編輯母片文字樣式</a:t>
+              <a:rPr lang="en-US" altLang="zh-TW"/>
+              <a:t>Click to edit Master text styles</a:t>
             </a:r>
           </a:p>
         </p:txBody>
@@ -1541,36 +1582,36 @@
           <a:p>
             <a:pPr lvl="0"/>
             <a:r>
-              <a:rPr lang="zh-TW" altLang="en-US" smtClean="0"/>
-              <a:t>按一下以編輯母片文字樣式</a:t>
+              <a:rPr lang="en-US" altLang="zh-TW"/>
+              <a:t>Click to edit Master text styles</a:t>
             </a:r>
           </a:p>
           <a:p>
             <a:pPr lvl="1"/>
             <a:r>
-              <a:rPr lang="zh-TW" altLang="en-US" smtClean="0"/>
-              <a:t>第二層</a:t>
+              <a:rPr lang="en-US" altLang="zh-TW"/>
+              <a:t>Second level</a:t>
             </a:r>
           </a:p>
           <a:p>
             <a:pPr lvl="2"/>
             <a:r>
-              <a:rPr lang="zh-TW" altLang="en-US" smtClean="0"/>
-              <a:t>第三層</a:t>
+              <a:rPr lang="en-US" altLang="zh-TW"/>
+              <a:t>Third level</a:t>
             </a:r>
           </a:p>
           <a:p>
             <a:pPr lvl="3"/>
             <a:r>
-              <a:rPr lang="zh-TW" altLang="en-US" smtClean="0"/>
-              <a:t>第四層</a:t>
+              <a:rPr lang="en-US" altLang="zh-TW"/>
+              <a:t>Fourth level</a:t>
             </a:r>
           </a:p>
           <a:p>
             <a:pPr lvl="4"/>
             <a:r>
-              <a:rPr lang="zh-TW" altLang="en-US" smtClean="0"/>
-              <a:t>第五層</a:t>
+              <a:rPr lang="en-US" altLang="zh-TW"/>
+              <a:t>Fifth level</a:t>
             </a:r>
             <a:endParaRPr lang="zh-TW" altLang="en-US"/>
           </a:p>
@@ -1588,7 +1629,7 @@
         </p:nvSpPr>
         <p:spPr>
           <a:xfrm>
-            <a:off x="4645026" y="1151335"/>
+            <a:off x="4645028" y="1151335"/>
             <a:ext cx="4041775" cy="479822"/>
           </a:xfrm>
         </p:spPr>
@@ -1635,8 +1676,8 @@
           <a:p>
             <a:pPr lvl="0"/>
             <a:r>
-              <a:rPr lang="zh-TW" altLang="en-US" smtClean="0"/>
-              <a:t>按一下以編輯母片文字樣式</a:t>
+              <a:rPr lang="en-US" altLang="zh-TW"/>
+              <a:t>Click to edit Master text styles</a:t>
             </a:r>
           </a:p>
         </p:txBody>
@@ -1653,7 +1694,7 @@
         </p:nvSpPr>
         <p:spPr>
           <a:xfrm>
-            <a:off x="4645026" y="1631156"/>
+            <a:off x="4645028" y="1631156"/>
             <a:ext cx="4041775" cy="2963466"/>
           </a:xfrm>
         </p:spPr>
@@ -1691,36 +1732,36 @@
           <a:p>
             <a:pPr lvl="0"/>
             <a:r>
-              <a:rPr lang="zh-TW" altLang="en-US" smtClean="0"/>
-              <a:t>按一下以編輯母片文字樣式</a:t>
+              <a:rPr lang="en-US" altLang="zh-TW"/>
+              <a:t>Click to edit Master text styles</a:t>
             </a:r>
           </a:p>
           <a:p>
             <a:pPr lvl="1"/>
             <a:r>
-              <a:rPr lang="zh-TW" altLang="en-US" smtClean="0"/>
-              <a:t>第二層</a:t>
+              <a:rPr lang="en-US" altLang="zh-TW"/>
+              <a:t>Second level</a:t>
             </a:r>
           </a:p>
           <a:p>
             <a:pPr lvl="2"/>
             <a:r>
-              <a:rPr lang="zh-TW" altLang="en-US" smtClean="0"/>
-              <a:t>第三層</a:t>
+              <a:rPr lang="en-US" altLang="zh-TW"/>
+              <a:t>Third level</a:t>
             </a:r>
           </a:p>
           <a:p>
             <a:pPr lvl="3"/>
             <a:r>
-              <a:rPr lang="zh-TW" altLang="en-US" smtClean="0"/>
-              <a:t>第四層</a:t>
+              <a:rPr lang="en-US" altLang="zh-TW"/>
+              <a:t>Fourth level</a:t>
             </a:r>
           </a:p>
           <a:p>
             <a:pPr lvl="4"/>
             <a:r>
-              <a:rPr lang="zh-TW" altLang="en-US" smtClean="0"/>
-              <a:t>第五層</a:t>
+              <a:rPr lang="en-US" altLang="zh-TW"/>
+              <a:t>Fifth level</a:t>
             </a:r>
             <a:endParaRPr lang="zh-TW" altLang="en-US"/>
           </a:p>
@@ -1743,7 +1784,7 @@
           <a:p>
             <a:fld id="{02ECE8F2-C913-4DF4-A996-09101B912AAC}" type="datetimeFigureOut">
               <a:rPr lang="zh-TW" altLang="en-US" smtClean="0"/>
-              <a:t>2023/7/6</a:t>
+              <a:t>2026/7/18</a:t>
             </a:fld>
             <a:endParaRPr lang="zh-TW" altLang="en-US"/>
           </a:p>
@@ -1792,6 +1833,11 @@
         </p:txBody>
       </p:sp>
     </p:spTree>
+    <p:extLst>
+      <p:ext uri="{BB962C8B-B14F-4D97-AF65-F5344CB8AC3E}">
+        <p14:creationId xmlns:p14="http://schemas.microsoft.com/office/powerpoint/2010/main" val="63695896"/>
+      </p:ext>
+    </p:extLst>
   </p:cSld>
   <p:clrMapOvr>
     <a:masterClrMapping/>
@@ -1832,8 +1878,8 @@
           <a:lstStyle/>
           <a:p>
             <a:r>
-              <a:rPr lang="zh-TW" altLang="en-US" smtClean="0"/>
-              <a:t>按一下以編輯母片標題樣式</a:t>
+              <a:rPr lang="en-US" altLang="zh-TW"/>
+              <a:t>Click to edit Master title style</a:t>
             </a:r>
             <a:endParaRPr lang="zh-TW" altLang="en-US"/>
           </a:p>
@@ -1856,7 +1902,7 @@
           <a:p>
             <a:fld id="{02ECE8F2-C913-4DF4-A996-09101B912AAC}" type="datetimeFigureOut">
               <a:rPr lang="zh-TW" altLang="en-US" smtClean="0"/>
-              <a:t>2023/7/6</a:t>
+              <a:t>2026/7/18</a:t>
             </a:fld>
             <a:endParaRPr lang="zh-TW" altLang="en-US"/>
           </a:p>
@@ -1905,6 +1951,11 @@
         </p:txBody>
       </p:sp>
     </p:spTree>
+    <p:extLst>
+      <p:ext uri="{BB962C8B-B14F-4D97-AF65-F5344CB8AC3E}">
+        <p14:creationId xmlns:p14="http://schemas.microsoft.com/office/powerpoint/2010/main" val="3978833027"/>
+      </p:ext>
+    </p:extLst>
   </p:cSld>
   <p:clrMapOvr>
     <a:masterClrMapping/>
@@ -1946,7 +1997,7 @@
           <a:p>
             <a:fld id="{02ECE8F2-C913-4DF4-A996-09101B912AAC}" type="datetimeFigureOut">
               <a:rPr lang="zh-TW" altLang="en-US" smtClean="0"/>
-              <a:t>2023/7/6</a:t>
+              <a:t>2026/7/18</a:t>
             </a:fld>
             <a:endParaRPr lang="zh-TW" altLang="en-US"/>
           </a:p>
@@ -1995,6 +2046,11 @@
         </p:txBody>
       </p:sp>
     </p:spTree>
+    <p:extLst>
+      <p:ext uri="{BB962C8B-B14F-4D97-AF65-F5344CB8AC3E}">
+        <p14:creationId xmlns:p14="http://schemas.microsoft.com/office/powerpoint/2010/main" val="1584105658"/>
+      </p:ext>
+    </p:extLst>
   </p:cSld>
   <p:clrMapOvr>
     <a:masterClrMapping/>
@@ -2031,7 +2087,7 @@
         </p:nvSpPr>
         <p:spPr>
           <a:xfrm>
-            <a:off x="457201" y="204787"/>
+            <a:off x="457202" y="204787"/>
             <a:ext cx="3008313" cy="871538"/>
           </a:xfrm>
         </p:spPr>
@@ -2044,8 +2100,8 @@
           </a:lstStyle>
           <a:p>
             <a:r>
-              <a:rPr lang="zh-TW" altLang="en-US" smtClean="0"/>
-              <a:t>按一下以編輯母片標題樣式</a:t>
+              <a:rPr lang="en-US" altLang="zh-TW"/>
+              <a:t>Click to edit Master title style</a:t>
             </a:r>
             <a:endParaRPr lang="zh-TW" altLang="en-US"/>
           </a:p>
@@ -2063,7 +2119,7 @@
         </p:nvSpPr>
         <p:spPr>
           <a:xfrm>
-            <a:off x="3575050" y="204788"/>
+            <a:off x="3575050" y="204789"/>
             <a:ext cx="5111750" cy="4389835"/>
           </a:xfrm>
         </p:spPr>
@@ -2101,36 +2157,36 @@
           <a:p>
             <a:pPr lvl="0"/>
             <a:r>
-              <a:rPr lang="zh-TW" altLang="en-US" smtClean="0"/>
-              <a:t>按一下以編輯母片文字樣式</a:t>
+              <a:rPr lang="en-US" altLang="zh-TW"/>
+              <a:t>Click to edit Master text styles</a:t>
             </a:r>
           </a:p>
           <a:p>
             <a:pPr lvl="1"/>
             <a:r>
-              <a:rPr lang="zh-TW" altLang="en-US" smtClean="0"/>
-              <a:t>第二層</a:t>
+              <a:rPr lang="en-US" altLang="zh-TW"/>
+              <a:t>Second level</a:t>
             </a:r>
           </a:p>
           <a:p>
             <a:pPr lvl="2"/>
             <a:r>
-              <a:rPr lang="zh-TW" altLang="en-US" smtClean="0"/>
-              <a:t>第三層</a:t>
+              <a:rPr lang="en-US" altLang="zh-TW"/>
+              <a:t>Third level</a:t>
             </a:r>
           </a:p>
           <a:p>
             <a:pPr lvl="3"/>
             <a:r>
-              <a:rPr lang="zh-TW" altLang="en-US" smtClean="0"/>
-              <a:t>第四層</a:t>
+              <a:rPr lang="en-US" altLang="zh-TW"/>
+              <a:t>Fourth level</a:t>
             </a:r>
           </a:p>
           <a:p>
             <a:pPr lvl="4"/>
             <a:r>
-              <a:rPr lang="zh-TW" altLang="en-US" smtClean="0"/>
-              <a:t>第五層</a:t>
+              <a:rPr lang="en-US" altLang="zh-TW"/>
+              <a:t>Fifth level</a:t>
             </a:r>
             <a:endParaRPr lang="zh-TW" altLang="en-US"/>
           </a:p>
@@ -2148,7 +2204,7 @@
         </p:nvSpPr>
         <p:spPr>
           <a:xfrm>
-            <a:off x="457201" y="1076326"/>
+            <a:off x="457202" y="1076327"/>
             <a:ext cx="3008313" cy="3518297"/>
           </a:xfrm>
         </p:spPr>
@@ -2195,8 +2251,8 @@
           <a:p>
             <a:pPr lvl="0"/>
             <a:r>
-              <a:rPr lang="zh-TW" altLang="en-US" smtClean="0"/>
-              <a:t>按一下以編輯母片文字樣式</a:t>
+              <a:rPr lang="en-US" altLang="zh-TW"/>
+              <a:t>Click to edit Master text styles</a:t>
             </a:r>
           </a:p>
         </p:txBody>
@@ -2218,7 +2274,7 @@
           <a:p>
             <a:fld id="{02ECE8F2-C913-4DF4-A996-09101B912AAC}" type="datetimeFigureOut">
               <a:rPr lang="zh-TW" altLang="en-US" smtClean="0"/>
-              <a:t>2023/7/6</a:t>
+              <a:t>2026/7/18</a:t>
             </a:fld>
             <a:endParaRPr lang="zh-TW" altLang="en-US"/>
           </a:p>
@@ -2267,6 +2323,11 @@
         </p:txBody>
       </p:sp>
     </p:spTree>
+    <p:extLst>
+      <p:ext uri="{BB962C8B-B14F-4D97-AF65-F5344CB8AC3E}">
+        <p14:creationId xmlns:p14="http://schemas.microsoft.com/office/powerpoint/2010/main" val="3005737003"/>
+      </p:ext>
+    </p:extLst>
   </p:cSld>
   <p:clrMapOvr>
     <a:masterClrMapping/>
@@ -2303,7 +2364,7 @@
         </p:nvSpPr>
         <p:spPr>
           <a:xfrm>
-            <a:off x="1792288" y="3600450"/>
+            <a:off x="1792288" y="3600451"/>
             <a:ext cx="5486400" cy="425054"/>
           </a:xfrm>
         </p:spPr>
@@ -2316,8 +2377,8 @@
           </a:lstStyle>
           <a:p>
             <a:r>
-              <a:rPr lang="zh-TW" altLang="en-US" smtClean="0"/>
-              <a:t>按一下以編輯母片標題樣式</a:t>
+              <a:rPr lang="en-US" altLang="zh-TW"/>
+              <a:t>Click to edit Master title style</a:t>
             </a:r>
             <a:endParaRPr lang="zh-TW" altLang="en-US"/>
           </a:p>
@@ -2380,6 +2441,10 @@
             </a:lvl9pPr>
           </a:lstStyle>
           <a:p>
+            <a:r>
+              <a:rPr lang="en-US" altLang="zh-TW"/>
+              <a:t>Click icon to add picture</a:t>
+            </a:r>
             <a:endParaRPr lang="zh-TW" altLang="en-US"/>
           </a:p>
         </p:txBody>
@@ -2396,7 +2461,7 @@
         </p:nvSpPr>
         <p:spPr>
           <a:xfrm>
-            <a:off x="1792288" y="4025503"/>
+            <a:off x="1792288" y="4025504"/>
             <a:ext cx="5486400" cy="603647"/>
           </a:xfrm>
         </p:spPr>
@@ -2443,8 +2508,8 @@
           <a:p>
             <a:pPr lvl="0"/>
             <a:r>
-              <a:rPr lang="zh-TW" altLang="en-US" smtClean="0"/>
-              <a:t>按一下以編輯母片文字樣式</a:t>
+              <a:rPr lang="en-US" altLang="zh-TW"/>
+              <a:t>Click to edit Master text styles</a:t>
             </a:r>
           </a:p>
         </p:txBody>
@@ -2466,7 +2531,7 @@
           <a:p>
             <a:fld id="{02ECE8F2-C913-4DF4-A996-09101B912AAC}" type="datetimeFigureOut">
               <a:rPr lang="zh-TW" altLang="en-US" smtClean="0"/>
-              <a:t>2023/7/6</a:t>
+              <a:t>2026/7/18</a:t>
             </a:fld>
             <a:endParaRPr lang="zh-TW" altLang="en-US"/>
           </a:p>
@@ -2515,6 +2580,11 @@
         </p:txBody>
       </p:sp>
     </p:spTree>
+    <p:extLst>
+      <p:ext uri="{BB962C8B-B14F-4D97-AF65-F5344CB8AC3E}">
+        <p14:creationId xmlns:p14="http://schemas.microsoft.com/office/powerpoint/2010/main" val="3707458347"/>
+      </p:ext>
+    </p:extLst>
   </p:cSld>
   <p:clrMapOvr>
     <a:masterClrMapping/>
@@ -2527,9 +2597,11 @@
   <p:cSld>
     <p:bg>
       <p:bgPr>
-        <a:solidFill>
-          <a:srgbClr val="002060"/>
-        </a:solidFill>
+        <a:blipFill dpi="0" rotWithShape="1">
+          <a:blip r:embed="rId13"/>
+          <a:srcRect/>
+          <a:tile tx="0" ty="0" sx="100000" sy="100000" flip="none" algn="tl"/>
+        </a:blipFill>
         <a:effectLst/>
       </p:bgPr>
     </p:bg>
@@ -2573,10 +2645,9 @@
           <a:lstStyle/>
           <a:p>
             <a:r>
-              <a:rPr lang="zh-TW" altLang="en-US" smtClean="0"/>
+              <a:rPr lang="zh-TW" altLang="en-US"/>
               <a:t>按一下以編輯母片標題樣式</a:t>
             </a:r>
-            <a:endParaRPr lang="zh-TW" altLang="en-US"/>
           </a:p>
         </p:txBody>
       </p:sp>
@@ -2607,38 +2678,37 @@
           <a:p>
             <a:pPr lvl="0"/>
             <a:r>
-              <a:rPr lang="zh-TW" altLang="en-US" smtClean="0"/>
+              <a:rPr lang="zh-TW" altLang="en-US"/>
               <a:t>按一下以編輯母片文字樣式</a:t>
             </a:r>
           </a:p>
           <a:p>
             <a:pPr lvl="1"/>
             <a:r>
-              <a:rPr lang="zh-TW" altLang="en-US" smtClean="0"/>
+              <a:rPr lang="zh-TW" altLang="en-US"/>
               <a:t>第二層</a:t>
             </a:r>
           </a:p>
           <a:p>
             <a:pPr lvl="2"/>
             <a:r>
-              <a:rPr lang="zh-TW" altLang="en-US" smtClean="0"/>
+              <a:rPr lang="zh-TW" altLang="en-US"/>
               <a:t>第三層</a:t>
             </a:r>
           </a:p>
           <a:p>
             <a:pPr lvl="3"/>
             <a:r>
-              <a:rPr lang="zh-TW" altLang="en-US" smtClean="0"/>
+              <a:rPr lang="zh-TW" altLang="en-US"/>
               <a:t>第四層</a:t>
             </a:r>
           </a:p>
           <a:p>
             <a:pPr lvl="4"/>
             <a:r>
-              <a:rPr lang="zh-TW" altLang="en-US" smtClean="0"/>
+              <a:rPr lang="zh-TW" altLang="en-US"/>
               <a:t>第五層</a:t>
             </a:r>
-            <a:endParaRPr lang="zh-TW" altLang="en-US"/>
           </a:p>
         </p:txBody>
       </p:sp>
@@ -2654,7 +2724,7 @@
         </p:nvSpPr>
         <p:spPr>
           <a:xfrm>
-            <a:off x="457200" y="4767263"/>
+            <a:off x="457200" y="4767264"/>
             <a:ext cx="2133600" cy="273844"/>
           </a:xfrm>
           <a:prstGeom prst="rect">
@@ -2677,7 +2747,7 @@
           <a:p>
             <a:fld id="{02ECE8F2-C913-4DF4-A996-09101B912AAC}" type="datetimeFigureOut">
               <a:rPr lang="zh-TW" altLang="en-US" smtClean="0"/>
-              <a:t>2023/7/6</a:t>
+              <a:t>2026/7/18</a:t>
             </a:fld>
             <a:endParaRPr lang="zh-TW" altLang="en-US"/>
           </a:p>
@@ -2695,7 +2765,7 @@
         </p:nvSpPr>
         <p:spPr>
           <a:xfrm>
-            <a:off x="3124200" y="4767263"/>
+            <a:off x="3124200" y="4767264"/>
             <a:ext cx="2895600" cy="273844"/>
           </a:xfrm>
           <a:prstGeom prst="rect">
@@ -2732,7 +2802,7 @@
         </p:nvSpPr>
         <p:spPr>
           <a:xfrm>
-            <a:off x="6553200" y="4767263"/>
+            <a:off x="6553200" y="4767264"/>
             <a:ext cx="2133600" cy="273844"/>
           </a:xfrm>
           <a:prstGeom prst="rect">
@@ -2762,20 +2832,25 @@
         </p:txBody>
       </p:sp>
     </p:spTree>
+    <p:extLst>
+      <p:ext uri="{BB962C8B-B14F-4D97-AF65-F5344CB8AC3E}">
+        <p14:creationId xmlns:p14="http://schemas.microsoft.com/office/powerpoint/2010/main" val="3807997694"/>
+      </p:ext>
+    </p:extLst>
   </p:cSld>
   <p:clrMap bg1="lt1" tx1="dk1" bg2="lt2" tx2="dk2" accent1="accent1" accent2="accent2" accent3="accent3" accent4="accent4" accent5="accent5" accent6="accent6" hlink="hlink" folHlink="folHlink"/>
   <p:sldLayoutIdLst>
-    <p:sldLayoutId id="2147483649" r:id="rId1"/>
-    <p:sldLayoutId id="2147483650" r:id="rId2"/>
-    <p:sldLayoutId id="2147483651" r:id="rId3"/>
-    <p:sldLayoutId id="2147483652" r:id="rId4"/>
-    <p:sldLayoutId id="2147483653" r:id="rId5"/>
-    <p:sldLayoutId id="2147483654" r:id="rId6"/>
-    <p:sldLayoutId id="2147483655" r:id="rId7"/>
-    <p:sldLayoutId id="2147483656" r:id="rId8"/>
-    <p:sldLayoutId id="2147483657" r:id="rId9"/>
-    <p:sldLayoutId id="2147483658" r:id="rId10"/>
-    <p:sldLayoutId id="2147483659" r:id="rId11"/>
+    <p:sldLayoutId id="2147483661" r:id="rId1"/>
+    <p:sldLayoutId id="2147483662" r:id="rId2"/>
+    <p:sldLayoutId id="2147483663" r:id="rId3"/>
+    <p:sldLayoutId id="2147483664" r:id="rId4"/>
+    <p:sldLayoutId id="2147483665" r:id="rId5"/>
+    <p:sldLayoutId id="2147483666" r:id="rId6"/>
+    <p:sldLayoutId id="2147483667" r:id="rId7"/>
+    <p:sldLayoutId id="2147483668" r:id="rId8"/>
+    <p:sldLayoutId id="2147483669" r:id="rId9"/>
+    <p:sldLayoutId id="2147483670" r:id="rId10"/>
+    <p:sldLayoutId id="2147483671" r:id="rId11"/>
   </p:sldLayoutIdLst>
   <p:txStyles>
     <p:titleStyle>
@@ -2799,7 +2874,7 @@
         <a:spcBef>
           <a:spcPct val="20000"/>
         </a:spcBef>
-        <a:buFont typeface="Arial" pitchFamily="34" charset="0"/>
+        <a:buFont typeface="Arial" panose="02080604020202020204" pitchFamily="34" charset="0"/>
         <a:buChar char="•"/>
         <a:defRPr sz="3200" kern="1200">
           <a:solidFill>
@@ -2814,7 +2889,7 @@
         <a:spcBef>
           <a:spcPct val="20000"/>
         </a:spcBef>
-        <a:buFont typeface="Arial" pitchFamily="34" charset="0"/>
+        <a:buFont typeface="Arial" panose="02080604020202020204" pitchFamily="34" charset="0"/>
         <a:buChar char="–"/>
         <a:defRPr sz="2800" kern="1200">
           <a:solidFill>
@@ -2829,7 +2904,7 @@
         <a:spcBef>
           <a:spcPct val="20000"/>
         </a:spcBef>
-        <a:buFont typeface="Arial" pitchFamily="34" charset="0"/>
+        <a:buFont typeface="Arial" panose="02080604020202020204" pitchFamily="34" charset="0"/>
         <a:buChar char="•"/>
         <a:defRPr sz="2400" kern="1200">
           <a:solidFill>
@@ -2844,7 +2919,7 @@
         <a:spcBef>
           <a:spcPct val="20000"/>
         </a:spcBef>
-        <a:buFont typeface="Arial" pitchFamily="34" charset="0"/>
+        <a:buFont typeface="Arial" panose="02080604020202020204" pitchFamily="34" charset="0"/>
         <a:buChar char="–"/>
         <a:defRPr sz="2000" kern="1200">
           <a:solidFill>
@@ -2859,7 +2934,7 @@
         <a:spcBef>
           <a:spcPct val="20000"/>
         </a:spcBef>
-        <a:buFont typeface="Arial" pitchFamily="34" charset="0"/>
+        <a:buFont typeface="Arial" panose="02080604020202020204" pitchFamily="34" charset="0"/>
         <a:buChar char="»"/>
         <a:defRPr sz="2000" kern="1200">
           <a:solidFill>
@@ -2874,7 +2949,7 @@
         <a:spcBef>
           <a:spcPct val="20000"/>
         </a:spcBef>
-        <a:buFont typeface="Arial" pitchFamily="34" charset="0"/>
+        <a:buFont typeface="Arial" panose="02080604020202020204" pitchFamily="34" charset="0"/>
         <a:buChar char="•"/>
         <a:defRPr sz="2000" kern="1200">
           <a:solidFill>
@@ -2889,7 +2964,7 @@
         <a:spcBef>
           <a:spcPct val="20000"/>
         </a:spcBef>
-        <a:buFont typeface="Arial" pitchFamily="34" charset="0"/>
+        <a:buFont typeface="Arial" panose="02080604020202020204" pitchFamily="34" charset="0"/>
         <a:buChar char="•"/>
         <a:defRPr sz="2000" kern="1200">
           <a:solidFill>
@@ -2904,7 +2979,7 @@
         <a:spcBef>
           <a:spcPct val="20000"/>
         </a:spcBef>
-        <a:buFont typeface="Arial" pitchFamily="34" charset="0"/>
+        <a:buFont typeface="Arial" panose="02080604020202020204" pitchFamily="34" charset="0"/>
         <a:buChar char="•"/>
         <a:defRPr sz="2000" kern="1200">
           <a:solidFill>
@@ -2919,7 +2994,7 @@
         <a:spcBef>
           <a:spcPct val="20000"/>
         </a:spcBef>
-        <a:buFont typeface="Arial" pitchFamily="34" charset="0"/>
+        <a:buFont typeface="Arial" panose="02080604020202020204" pitchFamily="34" charset="0"/>
         <a:buChar char="•"/>
         <a:defRPr sz="2000" kern="1200">
           <a:solidFill>
@@ -3064,23 +3139,17 @@
           </a:xfrm>
         </p:spPr>
         <p:txBody>
-          <a:bodyPr>
+          <a:bodyPr vert="horz" lIns="91440" tIns="45720" rIns="91440" bIns="45720" rtlCol="0" anchor="ctr">
             <a:noAutofit/>
           </a:bodyPr>
           <a:lstStyle/>
           <a:p>
             <a:r>
-              <a:rPr lang="zh-CN" altLang="en-US" sz="5400" b="1" i="1" dirty="0" smtClean="0">
-                <a:solidFill>
-                  <a:schemeClr val="bg1"/>
+              <a:rPr lang="zh-CN" altLang="en-US" sz="5400" b="1" i="1" dirty="0">
+                <a:solidFill>
+                  <a:srgbClr val="660033"/>
                 </a:solidFill>
                 <a:effectLst>
-                  <a:glow rad="139700">
-                    <a:schemeClr val="accent6">
-                      <a:satMod val="175000"/>
-                      <a:alpha val="40000"/>
-                    </a:schemeClr>
-                  </a:glow>
                   <a:outerShdw blurRad="38100" dist="38100" dir="2700000" algn="tl">
                     <a:srgbClr val="000000">
                       <a:alpha val="43137"/>
@@ -3092,46 +3161,19 @@
               </a:rPr>
               <a:t>禱告的力量</a:t>
             </a:r>
-            <a:endParaRPr lang="zh-CN" altLang="en-US" sz="5400" b="1" i="1" dirty="0">
-              <a:solidFill>
-                <a:schemeClr val="bg1"/>
-              </a:solidFill>
-              <a:effectLst>
-                <a:glow rad="139700">
-                  <a:schemeClr val="accent6">
-                    <a:satMod val="175000"/>
-                    <a:alpha val="40000"/>
-                  </a:schemeClr>
-                </a:glow>
-                <a:outerShdw blurRad="38100" dist="38100" dir="2700000" algn="tl">
-                  <a:srgbClr val="000000">
-                    <a:alpha val="43137"/>
-                  </a:srgbClr>
-                </a:outerShdw>
-              </a:effectLst>
-              <a:latin typeface="微軟正黑體" pitchFamily="34" charset="-120"/>
-              <a:ea typeface="微軟正黑體" pitchFamily="34" charset="-120"/>
-            </a:endParaRPr>
           </a:p>
         </p:txBody>
       </p:sp>
     </p:spTree>
     <p:extLst>
       <p:ext uri="{BB962C8B-B14F-4D97-AF65-F5344CB8AC3E}">
-        <p14:creationId xmlns="" xmlns:p14="http://schemas.microsoft.com/office/powerpoint/2010/main" val="1613805252"/>
+        <p14:creationId xmlns:p14="http://schemas.microsoft.com/office/powerpoint/2010/main" val="1613805252"/>
       </p:ext>
     </p:extLst>
   </p:cSld>
   <p:clrMapOvr>
     <a:masterClrMapping/>
   </p:clrMapOvr>
-  <p:timing>
-    <p:tnLst>
-      <p:par>
-        <p:cTn id="1" dur="indefinite" restart="never" nodeType="tmRoot"/>
-      </p:par>
-    </p:tnLst>
-  </p:timing>
 </p:sld>
 </file>
 
@@ -3169,7 +3211,7 @@
           </a:xfrm>
         </p:spPr>
         <p:txBody>
-          <a:bodyPr anchor="ctr">
+          <a:bodyPr vert="horz" lIns="91440" tIns="45720" rIns="91440" bIns="45720" rtlCol="0" anchor="ctr">
             <a:normAutofit/>
           </a:bodyPr>
           <a:lstStyle/>
@@ -3178,129 +3220,111 @@
               <a:buNone/>
             </a:pPr>
             <a:r>
-              <a:rPr lang="zh-TW" altLang="en-US" sz="4800" b="1" dirty="0" smtClean="0">
-                <a:solidFill>
-                  <a:schemeClr val="bg1"/>
-                </a:solidFill>
-                <a:effectLst>
-                  <a:glow rad="139700">
-                    <a:schemeClr val="accent6">
-                      <a:satMod val="175000"/>
-                      <a:alpha val="40000"/>
-                    </a:schemeClr>
-                  </a:glow>
-                </a:effectLst>
+              <a:rPr lang="zh-TW" altLang="en-US" sz="4800" b="1" dirty="0">
+                <a:solidFill>
+                  <a:srgbClr val="660033"/>
+                </a:solidFill>
                 <a:latin typeface="微軟正黑體" pitchFamily="34" charset="-120"/>
                 <a:ea typeface="微軟正黑體" pitchFamily="34" charset="-120"/>
               </a:rPr>
-              <a:t>以</a:t>
-            </a:r>
+              <a:t>以禱告播下救恩的種子</a:t>
+            </a:r>
+            <a:endParaRPr lang="en-US" altLang="zh-TW" sz="4800" b="1" dirty="0">
+              <a:solidFill>
+                <a:srgbClr val="660033"/>
+              </a:solidFill>
+              <a:latin typeface="微軟正黑體" pitchFamily="34" charset="-120"/>
+              <a:ea typeface="微軟正黑體" pitchFamily="34" charset="-120"/>
+            </a:endParaRPr>
+          </a:p>
+          <a:p>
+            <a:pPr algn="ctr">
+              <a:buNone/>
+            </a:pPr>
             <a:r>
               <a:rPr lang="zh-TW" altLang="en-US" sz="4800" b="1" dirty="0">
                 <a:solidFill>
-                  <a:schemeClr val="bg1"/>
-                </a:solidFill>
-                <a:effectLst>
-                  <a:glow rad="139700">
-                    <a:schemeClr val="accent6">
-                      <a:satMod val="175000"/>
-                      <a:alpha val="40000"/>
-                    </a:schemeClr>
-                  </a:glow>
-                </a:effectLst>
+                  <a:srgbClr val="660033"/>
+                </a:solidFill>
                 <a:latin typeface="微軟正黑體" pitchFamily="34" charset="-120"/>
                 <a:ea typeface="微軟正黑體" pitchFamily="34" charset="-120"/>
               </a:rPr>
-              <a:t>禱告播下救恩的</a:t>
-            </a:r>
-            <a:r>
-              <a:rPr lang="zh-TW" altLang="en-US" sz="4800" b="1" dirty="0" smtClean="0">
-                <a:solidFill>
-                  <a:schemeClr val="bg1"/>
-                </a:solidFill>
-                <a:effectLst>
-                  <a:glow rad="139700">
-                    <a:schemeClr val="accent6">
-                      <a:satMod val="175000"/>
-                      <a:alpha val="40000"/>
-                    </a:schemeClr>
-                  </a:glow>
-                </a:effectLst>
-                <a:latin typeface="微軟正黑體" pitchFamily="34" charset="-120"/>
-                <a:ea typeface="微軟正黑體" pitchFamily="34" charset="-120"/>
-              </a:rPr>
-              <a:t>種子</a:t>
+              <a:t>以淚水澆灌心靈的深處</a:t>
             </a:r>
             <a:endParaRPr lang="en-US" altLang="zh-TW" sz="4800" b="1" dirty="0">
               <a:solidFill>
-                <a:schemeClr val="bg1"/>
+                <a:srgbClr val="660033"/>
               </a:solidFill>
-              <a:effectLst>
-                <a:glow rad="139700">
-                  <a:schemeClr val="accent6">
-                    <a:satMod val="175000"/>
-                    <a:alpha val="40000"/>
-                  </a:schemeClr>
-                </a:glow>
-              </a:effectLst>
               <a:latin typeface="微軟正黑體" pitchFamily="34" charset="-120"/>
               <a:ea typeface="微軟正黑體" pitchFamily="34" charset="-120"/>
             </a:endParaRPr>
           </a:p>
-          <a:p>
-            <a:pPr algn="ctr">
-              <a:buNone/>
-            </a:pPr>
-            <a:r>
-              <a:rPr lang="zh-TW" altLang="en-US" sz="4800" b="1" dirty="0" smtClean="0">
-                <a:solidFill>
-                  <a:schemeClr val="bg1"/>
-                </a:solidFill>
-                <a:effectLst>
-                  <a:glow rad="139700">
-                    <a:schemeClr val="accent6">
-                      <a:satMod val="175000"/>
-                      <a:alpha val="40000"/>
-                    </a:schemeClr>
-                  </a:glow>
-                </a:effectLst>
-                <a:latin typeface="微軟正黑體" pitchFamily="34" charset="-120"/>
-                <a:ea typeface="微軟正黑體" pitchFamily="34" charset="-120"/>
+        </p:txBody>
+      </p:sp>
+      <p:sp>
+        <p:nvSpPr>
+          <p:cNvPr id="2" name="TextBox 1">
+            <a:extLst>
+              <a:ext uri="{FF2B5EF4-FFF2-40B4-BE49-F238E27FC236}">
+                <a16:creationId xmlns:a16="http://schemas.microsoft.com/office/drawing/2014/main" id="{252A54E0-0B65-60AD-C3C4-2733A8C3B275}"/>
+              </a:ext>
+            </a:extLst>
+          </p:cNvPr>
+          <p:cNvSpPr txBox="1"/>
+          <p:nvPr/>
+        </p:nvSpPr>
+        <p:spPr>
+          <a:xfrm>
+            <a:off x="0" y="3867895"/>
+            <a:ext cx="9144000" cy="461665"/>
+          </a:xfrm>
+          <a:prstGeom prst="rect">
+            <a:avLst/>
+          </a:prstGeom>
+          <a:noFill/>
+        </p:spPr>
+        <p:txBody>
+          <a:bodyPr wrap="square" rtlCol="0">
+            <a:spAutoFit/>
+          </a:bodyPr>
+          <a:lstStyle/>
+          <a:p>
+            <a:pPr algn="ctr"/>
+            <a:r>
+              <a:rPr lang="en-US" sz="2400" b="1" dirty="0">
+                <a:solidFill>
+                  <a:srgbClr val="660033"/>
+                </a:solidFill>
+                <a:latin typeface="Microsoft JhengHei" panose="020B0604030504040204" pitchFamily="34" charset="-120"/>
+                <a:ea typeface="Microsoft JhengHei" panose="020B0604030504040204" pitchFamily="34" charset="-120"/>
               </a:rPr>
-              <a:t>以</a:t>
-            </a:r>
-            <a:r>
-              <a:rPr lang="zh-TW" altLang="en-US" sz="4800" b="1" dirty="0">
-                <a:solidFill>
-                  <a:schemeClr val="bg1"/>
-                </a:solidFill>
-                <a:effectLst>
-                  <a:glow rad="139700">
-                    <a:schemeClr val="accent6">
-                      <a:satMod val="175000"/>
-                      <a:alpha val="40000"/>
-                    </a:schemeClr>
-                  </a:glow>
-                </a:effectLst>
-                <a:latin typeface="微軟正黑體" pitchFamily="34" charset="-120"/>
-                <a:ea typeface="微軟正黑體" pitchFamily="34" charset="-120"/>
+              <a:t>( </a:t>
+            </a:r>
+            <a:r>
+              <a:rPr lang="zh-CN" altLang="en-US" sz="2400" b="1" dirty="0">
+                <a:solidFill>
+                  <a:srgbClr val="660033"/>
+                </a:solidFill>
+                <a:latin typeface="Microsoft JhengHei" panose="020B0604030504040204" pitchFamily="34" charset="-120"/>
+                <a:ea typeface="Microsoft JhengHei" panose="020B0604030504040204" pitchFamily="34" charset="-120"/>
               </a:rPr>
-              <a:t>淚水澆灌心靈的深處</a:t>
-            </a:r>
-            <a:endParaRPr lang="en-US" altLang="zh-TW" sz="4800" b="1" dirty="0">
+              <a:t>正歌</a:t>
+            </a:r>
+            <a:r>
+              <a:rPr lang="en-US" sz="2400" b="1" dirty="0">
+                <a:solidFill>
+                  <a:srgbClr val="660033"/>
+                </a:solidFill>
+                <a:latin typeface="Microsoft JhengHei" panose="020B0604030504040204" pitchFamily="34" charset="-120"/>
+                <a:ea typeface="Microsoft JhengHei" panose="020B0604030504040204" pitchFamily="34" charset="-120"/>
+              </a:rPr>
+              <a:t> )</a:t>
+            </a:r>
+            <a:endParaRPr lang="vi-VN" sz="2400" b="1" dirty="0">
               <a:solidFill>
-                <a:schemeClr val="bg1"/>
+                <a:srgbClr val="660033"/>
               </a:solidFill>
-              <a:effectLst>
-                <a:glow rad="139700">
-                  <a:schemeClr val="accent6">
-                    <a:satMod val="175000"/>
-                    <a:alpha val="40000"/>
-                  </a:schemeClr>
-                </a:glow>
-              </a:effectLst>
-              <a:latin typeface="微軟正黑體" pitchFamily="34" charset="-120"/>
-              <a:ea typeface="微軟正黑體" pitchFamily="34" charset="-120"/>
+              <a:ea typeface="Microsoft JhengHei" panose="020B0604030504040204" pitchFamily="34" charset="-120"/>
             </a:endParaRPr>
           </a:p>
         </p:txBody>
@@ -3308,20 +3332,13 @@
     </p:spTree>
     <p:extLst>
       <p:ext uri="{BB962C8B-B14F-4D97-AF65-F5344CB8AC3E}">
-        <p14:creationId xmlns="" xmlns:p14="http://schemas.microsoft.com/office/powerpoint/2010/main" val="1099146365"/>
+        <p14:creationId xmlns:p14="http://schemas.microsoft.com/office/powerpoint/2010/main" val="1099146365"/>
       </p:ext>
     </p:extLst>
   </p:cSld>
   <p:clrMapOvr>
     <a:masterClrMapping/>
   </p:clrMapOvr>
-  <p:timing>
-    <p:tnLst>
-      <p:par>
-        <p:cTn id="1" dur="indefinite" restart="never" nodeType="tmRoot"/>
-      </p:par>
-    </p:tnLst>
-  </p:timing>
 </p:sld>
 </file>
 
@@ -3359,7 +3376,7 @@
           </a:xfrm>
         </p:spPr>
         <p:txBody>
-          <a:bodyPr anchor="ctr">
+          <a:bodyPr vert="horz" lIns="91440" tIns="45720" rIns="91440" bIns="45720" rtlCol="0" anchor="ctr">
             <a:normAutofit/>
           </a:bodyPr>
           <a:lstStyle/>
@@ -3370,109 +3387,109 @@
             <a:r>
               <a:rPr lang="zh-TW" altLang="en-US" sz="4800" b="1" dirty="0">
                 <a:solidFill>
-                  <a:schemeClr val="bg1"/>
-                </a:solidFill>
-                <a:effectLst>
-                  <a:glow rad="139700">
-                    <a:schemeClr val="accent6">
-                      <a:satMod val="175000"/>
-                      <a:alpha val="40000"/>
-                    </a:schemeClr>
-                  </a:glow>
-                </a:effectLst>
+                  <a:srgbClr val="660033"/>
+                </a:solidFill>
                 <a:latin typeface="微軟正黑體" pitchFamily="34" charset="-120"/>
                 <a:ea typeface="微軟正黑體" pitchFamily="34" charset="-120"/>
               </a:rPr>
-              <a:t>神的靈使軟弱的心變得</a:t>
-            </a:r>
-            <a:r>
-              <a:rPr lang="zh-TW" altLang="en-US" sz="4800" b="1" dirty="0" smtClean="0">
-                <a:solidFill>
-                  <a:schemeClr val="bg1"/>
-                </a:solidFill>
-                <a:effectLst>
-                  <a:glow rad="139700">
-                    <a:schemeClr val="accent6">
-                      <a:satMod val="175000"/>
-                      <a:alpha val="40000"/>
-                    </a:schemeClr>
-                  </a:glow>
-                </a:effectLst>
+              <a:t>神的靈使軟弱的心變得剛強</a:t>
+            </a:r>
+            <a:endParaRPr lang="en-US" altLang="zh-TW" sz="4800" b="1" dirty="0">
+              <a:solidFill>
+                <a:srgbClr val="660033"/>
+              </a:solidFill>
+              <a:latin typeface="微軟正黑體" pitchFamily="34" charset="-120"/>
+              <a:ea typeface="微軟正黑體" pitchFamily="34" charset="-120"/>
+            </a:endParaRPr>
+          </a:p>
+          <a:p>
+            <a:pPr algn="ctr">
+              <a:buNone/>
+            </a:pPr>
+            <a:r>
+              <a:rPr lang="zh-TW" altLang="en-US" sz="4800" b="1" dirty="0">
+                <a:solidFill>
+                  <a:srgbClr val="660033"/>
+                </a:solidFill>
                 <a:latin typeface="微軟正黑體" pitchFamily="34" charset="-120"/>
                 <a:ea typeface="微軟正黑體" pitchFamily="34" charset="-120"/>
               </a:rPr>
-              <a:t>剛強</a:t>
-            </a:r>
-            <a:endParaRPr lang="en-US" altLang="zh-TW" sz="4800" b="1" dirty="0" smtClean="0">
+              <a:t>我的信心建立在耶穌這磐石上</a:t>
+            </a:r>
+            <a:endParaRPr lang="en-US" altLang="zh-TW" sz="4800" b="1" dirty="0">
               <a:solidFill>
-                <a:schemeClr val="bg1"/>
+                <a:srgbClr val="660033"/>
               </a:solidFill>
-              <a:effectLst>
-                <a:glow rad="139700">
-                  <a:schemeClr val="accent6">
-                    <a:satMod val="175000"/>
-                    <a:alpha val="40000"/>
-                  </a:schemeClr>
-                </a:glow>
-              </a:effectLst>
               <a:latin typeface="微軟正黑體" pitchFamily="34" charset="-120"/>
               <a:ea typeface="微軟正黑體" pitchFamily="34" charset="-120"/>
             </a:endParaRPr>
           </a:p>
-          <a:p>
-            <a:pPr algn="ctr">
-              <a:buNone/>
-            </a:pPr>
-            <a:r>
-              <a:rPr lang="zh-TW" altLang="en-US" sz="4800" b="1" dirty="0" smtClean="0">
-                <a:solidFill>
-                  <a:schemeClr val="bg1"/>
-                </a:solidFill>
-                <a:effectLst>
-                  <a:glow rad="139700">
-                    <a:schemeClr val="accent6">
-                      <a:satMod val="175000"/>
-                      <a:alpha val="40000"/>
-                    </a:schemeClr>
-                  </a:glow>
-                </a:effectLst>
-                <a:latin typeface="微軟正黑體" pitchFamily="34" charset="-120"/>
-                <a:ea typeface="微軟正黑體" pitchFamily="34" charset="-120"/>
+        </p:txBody>
+      </p:sp>
+      <p:sp>
+        <p:nvSpPr>
+          <p:cNvPr id="2" name="TextBox 1">
+            <a:extLst>
+              <a:ext uri="{FF2B5EF4-FFF2-40B4-BE49-F238E27FC236}">
+                <a16:creationId xmlns:a16="http://schemas.microsoft.com/office/drawing/2014/main" id="{59E12BBE-9473-CFA8-5D7E-FA341A06D1D1}"/>
+              </a:ext>
+            </a:extLst>
+          </p:cNvPr>
+          <p:cNvSpPr txBox="1"/>
+          <p:nvPr/>
+        </p:nvSpPr>
+        <p:spPr>
+          <a:xfrm>
+            <a:off x="0" y="3867895"/>
+            <a:ext cx="9144000" cy="461665"/>
+          </a:xfrm>
+          <a:prstGeom prst="rect">
+            <a:avLst/>
+          </a:prstGeom>
+          <a:noFill/>
+        </p:spPr>
+        <p:txBody>
+          <a:bodyPr wrap="square" rtlCol="0">
+            <a:spAutoFit/>
+          </a:bodyPr>
+          <a:lstStyle/>
+          <a:p>
+            <a:pPr algn="ctr"/>
+            <a:r>
+              <a:rPr lang="en-US" sz="2400" b="1" dirty="0">
+                <a:solidFill>
+                  <a:srgbClr val="660033"/>
+                </a:solidFill>
+                <a:latin typeface="Microsoft JhengHei" panose="020B0604030504040204" pitchFamily="34" charset="-120"/>
+                <a:ea typeface="Microsoft JhengHei" panose="020B0604030504040204" pitchFamily="34" charset="-120"/>
               </a:rPr>
-              <a:t>我</a:t>
-            </a:r>
-            <a:r>
-              <a:rPr lang="zh-TW" altLang="en-US" sz="4800" b="1" dirty="0">
-                <a:solidFill>
-                  <a:schemeClr val="bg1"/>
-                </a:solidFill>
-                <a:effectLst>
-                  <a:glow rad="139700">
-                    <a:schemeClr val="accent6">
-                      <a:satMod val="175000"/>
-                      <a:alpha val="40000"/>
-                    </a:schemeClr>
-                  </a:glow>
-                </a:effectLst>
-                <a:latin typeface="微軟正黑體" pitchFamily="34" charset="-120"/>
-                <a:ea typeface="微軟正黑體" pitchFamily="34" charset="-120"/>
+              <a:t>( </a:t>
+            </a:r>
+            <a:r>
+              <a:rPr lang="zh-CN" altLang="en-US" sz="2400" b="1" dirty="0">
+                <a:solidFill>
+                  <a:srgbClr val="660033"/>
+                </a:solidFill>
+                <a:latin typeface="Microsoft JhengHei" panose="020B0604030504040204" pitchFamily="34" charset="-120"/>
+                <a:ea typeface="Microsoft JhengHei" panose="020B0604030504040204" pitchFamily="34" charset="-120"/>
               </a:rPr>
-              <a:t>的信心建立在耶穌這磐石上</a:t>
-            </a:r>
-            <a:endParaRPr lang="en-US" altLang="zh-TW" sz="4800" b="1" dirty="0">
+              <a:t>正歌</a:t>
+            </a:r>
+            <a:r>
+              <a:rPr lang="en-US" sz="2400" b="1" dirty="0">
+                <a:solidFill>
+                  <a:srgbClr val="660033"/>
+                </a:solidFill>
+                <a:latin typeface="Microsoft JhengHei" panose="020B0604030504040204" pitchFamily="34" charset="-120"/>
+                <a:ea typeface="Microsoft JhengHei" panose="020B0604030504040204" pitchFamily="34" charset="-120"/>
+              </a:rPr>
+              <a:t> )</a:t>
+            </a:r>
+            <a:endParaRPr lang="vi-VN" sz="2400" b="1" dirty="0">
               <a:solidFill>
-                <a:schemeClr val="bg1"/>
+                <a:srgbClr val="660033"/>
               </a:solidFill>
-              <a:effectLst>
-                <a:glow rad="139700">
-                  <a:schemeClr val="accent6">
-                    <a:satMod val="175000"/>
-                    <a:alpha val="40000"/>
-                  </a:schemeClr>
-                </a:glow>
-              </a:effectLst>
-              <a:latin typeface="微軟正黑體" pitchFamily="34" charset="-120"/>
-              <a:ea typeface="微軟正黑體" pitchFamily="34" charset="-120"/>
+              <a:ea typeface="Microsoft JhengHei" panose="020B0604030504040204" pitchFamily="34" charset="-120"/>
             </a:endParaRPr>
           </a:p>
         </p:txBody>
@@ -3480,20 +3497,13 @@
     </p:spTree>
     <p:extLst>
       <p:ext uri="{BB962C8B-B14F-4D97-AF65-F5344CB8AC3E}">
-        <p14:creationId xmlns="" xmlns:p14="http://schemas.microsoft.com/office/powerpoint/2010/main" val="1099146365"/>
+        <p14:creationId xmlns:p14="http://schemas.microsoft.com/office/powerpoint/2010/main" val="1099146365"/>
       </p:ext>
     </p:extLst>
   </p:cSld>
   <p:clrMapOvr>
     <a:masterClrMapping/>
   </p:clrMapOvr>
-  <p:timing>
-    <p:tnLst>
-      <p:par>
-        <p:cTn id="1" dur="indefinite" restart="never" nodeType="tmRoot"/>
-      </p:par>
-    </p:tnLst>
-  </p:timing>
 </p:sld>
 </file>
 
@@ -3531,7 +3541,7 @@
           </a:xfrm>
         </p:spPr>
         <p:txBody>
-          <a:bodyPr anchor="ctr">
+          <a:bodyPr vert="horz" lIns="91440" tIns="45720" rIns="91440" bIns="45720" rtlCol="0" anchor="ctr">
             <a:normAutofit/>
           </a:bodyPr>
           <a:lstStyle/>
@@ -3542,113 +3552,109 @@
             <a:r>
               <a:rPr lang="zh-TW" altLang="en-US" sz="4800" b="1" dirty="0">
                 <a:solidFill>
-                  <a:schemeClr val="bg1"/>
-                </a:solidFill>
-                <a:effectLst>
-                  <a:glow rad="139700">
-                    <a:schemeClr val="accent6">
-                      <a:satMod val="175000"/>
-                      <a:alpha val="40000"/>
-                    </a:schemeClr>
-                  </a:glow>
-                </a:effectLst>
+                  <a:srgbClr val="660033"/>
+                </a:solidFill>
                 <a:latin typeface="微軟正黑體" pitchFamily="34" charset="-120"/>
                 <a:ea typeface="微軟正黑體" pitchFamily="34" charset="-120"/>
               </a:rPr>
-              <a:t>禱告的力量　時間可以</a:t>
-            </a:r>
-            <a:r>
-              <a:rPr lang="zh-TW" altLang="en-US" sz="4800" b="1" dirty="0" smtClean="0">
-                <a:solidFill>
-                  <a:schemeClr val="bg1"/>
-                </a:solidFill>
-                <a:effectLst>
-                  <a:glow rad="139700">
-                    <a:schemeClr val="accent6">
-                      <a:satMod val="175000"/>
-                      <a:alpha val="40000"/>
-                    </a:schemeClr>
-                  </a:glow>
-                </a:effectLst>
+              <a:t>禱告的力量　時間可以證明</a:t>
+            </a:r>
+            <a:endParaRPr lang="en-US" altLang="zh-TW" sz="4800" b="1" dirty="0">
+              <a:solidFill>
+                <a:srgbClr val="660033"/>
+              </a:solidFill>
+              <a:latin typeface="微軟正黑體" pitchFamily="34" charset="-120"/>
+              <a:ea typeface="微軟正黑體" pitchFamily="34" charset="-120"/>
+            </a:endParaRPr>
+          </a:p>
+          <a:p>
+            <a:pPr algn="ctr">
+              <a:buNone/>
+            </a:pPr>
+            <a:r>
+              <a:rPr lang="zh-TW" altLang="en-US" sz="4800" b="1" dirty="0">
+                <a:solidFill>
+                  <a:srgbClr val="660033"/>
+                </a:solidFill>
                 <a:latin typeface="微軟正黑體" pitchFamily="34" charset="-120"/>
                 <a:ea typeface="微軟正黑體" pitchFamily="34" charset="-120"/>
               </a:rPr>
-              <a:t>證明</a:t>
-            </a:r>
-            <a:endParaRPr lang="en-US" altLang="zh-TW" sz="4800" b="1" dirty="0" smtClean="0">
+              <a:t>改變的大能　在耶穌基督裡　　</a:t>
+            </a:r>
+            <a:endParaRPr lang="en-US" altLang="zh-TW" sz="4800" b="1" dirty="0">
               <a:solidFill>
-                <a:schemeClr val="bg1"/>
+                <a:srgbClr val="660033"/>
               </a:solidFill>
-              <a:effectLst>
-                <a:glow rad="139700">
-                  <a:schemeClr val="accent6">
-                    <a:satMod val="175000"/>
-                    <a:alpha val="40000"/>
-                  </a:schemeClr>
-                </a:glow>
-              </a:effectLst>
               <a:latin typeface="微軟正黑體" pitchFamily="34" charset="-120"/>
               <a:ea typeface="微軟正黑體" pitchFamily="34" charset="-120"/>
             </a:endParaRPr>
           </a:p>
-          <a:p>
-            <a:pPr algn="ctr">
-              <a:buNone/>
-            </a:pPr>
-            <a:r>
-              <a:rPr lang="zh-TW" altLang="en-US" sz="4800" b="1" dirty="0" smtClean="0">
-                <a:solidFill>
-                  <a:schemeClr val="bg1"/>
-                </a:solidFill>
-                <a:effectLst>
-                  <a:glow rad="139700">
-                    <a:schemeClr val="accent6">
-                      <a:satMod val="175000"/>
-                      <a:alpha val="40000"/>
-                    </a:schemeClr>
-                  </a:glow>
-                </a:effectLst>
-                <a:latin typeface="微軟正黑體" pitchFamily="34" charset="-120"/>
-                <a:ea typeface="微軟正黑體" pitchFamily="34" charset="-120"/>
+        </p:txBody>
+      </p:sp>
+      <p:sp>
+        <p:nvSpPr>
+          <p:cNvPr id="2" name="TextBox 1">
+            <a:extLst>
+              <a:ext uri="{FF2B5EF4-FFF2-40B4-BE49-F238E27FC236}">
+                <a16:creationId xmlns:a16="http://schemas.microsoft.com/office/drawing/2014/main" id="{7F0CC616-FEEC-5100-0B3A-8A6393CE89EA}"/>
+              </a:ext>
+            </a:extLst>
+          </p:cNvPr>
+          <p:cNvSpPr txBox="1"/>
+          <p:nvPr/>
+        </p:nvSpPr>
+        <p:spPr>
+          <a:xfrm>
+            <a:off x="0" y="3867895"/>
+            <a:ext cx="9144000" cy="461665"/>
+          </a:xfrm>
+          <a:prstGeom prst="rect">
+            <a:avLst/>
+          </a:prstGeom>
+          <a:noFill/>
+        </p:spPr>
+        <p:txBody>
+          <a:bodyPr wrap="square" rtlCol="0">
+            <a:spAutoFit/>
+          </a:bodyPr>
+          <a:lstStyle/>
+          <a:p>
+            <a:pPr algn="ctr"/>
+            <a:r>
+              <a:rPr lang="en-US" sz="2400" b="1" dirty="0">
+                <a:solidFill>
+                  <a:srgbClr val="660033"/>
+                </a:solidFill>
+                <a:latin typeface="Microsoft JhengHei" panose="020B0604030504040204" pitchFamily="34" charset="-120"/>
+                <a:ea typeface="Microsoft JhengHei" panose="020B0604030504040204" pitchFamily="34" charset="-120"/>
               </a:rPr>
-              <a:t>改變</a:t>
-            </a:r>
-            <a:r>
-              <a:rPr lang="zh-TW" altLang="en-US" sz="4800" b="1" dirty="0">
-                <a:solidFill>
-                  <a:schemeClr val="bg1"/>
-                </a:solidFill>
-                <a:effectLst>
-                  <a:glow rad="139700">
-                    <a:schemeClr val="accent6">
-                      <a:satMod val="175000"/>
-                      <a:alpha val="40000"/>
-                    </a:schemeClr>
-                  </a:glow>
-                </a:effectLst>
-                <a:latin typeface="微軟正黑體" pitchFamily="34" charset="-120"/>
-                <a:ea typeface="微軟正黑體" pitchFamily="34" charset="-120"/>
+              <a:t>( </a:t>
+            </a:r>
+            <a:r>
+              <a:rPr lang="zh-CN" altLang="en-US" sz="2400" b="1" dirty="0">
+                <a:solidFill>
+                  <a:srgbClr val="660033"/>
+                </a:solidFill>
+                <a:latin typeface="Microsoft JhengHei" panose="020B0604030504040204" pitchFamily="34" charset="-120"/>
+                <a:ea typeface="Microsoft JhengHei" panose="020B0604030504040204" pitchFamily="34" charset="-120"/>
               </a:rPr>
-              <a:t>的大能　在耶穌基督裡</a:t>
-            </a:r>
-            <a:r>
-              <a:rPr lang="zh-TW" altLang="en-US" sz="4800" dirty="0"/>
-              <a:t>　　</a:t>
-            </a:r>
-            <a:endParaRPr lang="en-US" altLang="zh-TW" sz="4800" b="1" dirty="0">
+              <a:t>副歌</a:t>
+            </a:r>
+            <a:r>
+              <a:rPr lang="en-US" sz="2400" b="1" dirty="0">
+                <a:solidFill>
+                  <a:srgbClr val="660033"/>
+                </a:solidFill>
+                <a:latin typeface="Microsoft JhengHei" panose="020B0604030504040204" pitchFamily="34" charset="-120"/>
+                <a:ea typeface="Microsoft JhengHei" panose="020B0604030504040204" pitchFamily="34" charset="-120"/>
+              </a:rPr>
+              <a:t> )</a:t>
+            </a:r>
+            <a:endParaRPr lang="vi-VN" sz="2400" b="1" dirty="0">
               <a:solidFill>
-                <a:schemeClr val="bg1"/>
+                <a:srgbClr val="660033"/>
               </a:solidFill>
-              <a:effectLst>
-                <a:glow rad="139700">
-                  <a:schemeClr val="accent6">
-                    <a:satMod val="175000"/>
-                    <a:alpha val="40000"/>
-                  </a:schemeClr>
-                </a:glow>
-              </a:effectLst>
-              <a:latin typeface="微軟正黑體" pitchFamily="34" charset="-120"/>
-              <a:ea typeface="微軟正黑體" pitchFamily="34" charset="-120"/>
+              <a:ea typeface="Microsoft JhengHei" panose="020B0604030504040204" pitchFamily="34" charset="-120"/>
             </a:endParaRPr>
           </a:p>
         </p:txBody>
@@ -3656,20 +3662,13 @@
     </p:spTree>
     <p:extLst>
       <p:ext uri="{BB962C8B-B14F-4D97-AF65-F5344CB8AC3E}">
-        <p14:creationId xmlns="" xmlns:p14="http://schemas.microsoft.com/office/powerpoint/2010/main" val="1099146365"/>
+        <p14:creationId xmlns:p14="http://schemas.microsoft.com/office/powerpoint/2010/main" val="1099146365"/>
       </p:ext>
     </p:extLst>
   </p:cSld>
   <p:clrMapOvr>
     <a:masterClrMapping/>
   </p:clrMapOvr>
-  <p:timing>
-    <p:tnLst>
-      <p:par>
-        <p:cTn id="1" dur="indefinite" restart="never" nodeType="tmRoot"/>
-      </p:par>
-    </p:tnLst>
-  </p:timing>
 </p:sld>
 </file>
 
@@ -3707,7 +3706,7 @@
           </a:xfrm>
         </p:spPr>
         <p:txBody>
-          <a:bodyPr anchor="ctr">
+          <a:bodyPr vert="horz" lIns="91440" tIns="45720" rIns="91440" bIns="45720" rtlCol="0" anchor="ctr">
             <a:normAutofit/>
           </a:bodyPr>
           <a:lstStyle/>
@@ -3718,33 +3717,37 @@
             <a:r>
               <a:rPr lang="zh-TW" altLang="en-US" sz="4800" b="1" dirty="0">
                 <a:solidFill>
-                  <a:schemeClr val="bg1"/>
-                </a:solidFill>
-                <a:effectLst>
-                  <a:glow rad="139700">
-                    <a:schemeClr val="accent6">
-                      <a:satMod val="175000"/>
-                      <a:alpha val="40000"/>
-                    </a:schemeClr>
-                  </a:glow>
-                </a:effectLst>
+                  <a:srgbClr val="660033"/>
+                </a:solidFill>
                 <a:latin typeface="微軟正黑體" pitchFamily="34" charset="-120"/>
                 <a:ea typeface="微軟正黑體" pitchFamily="34" charset="-120"/>
               </a:rPr>
-              <a:t>獻上馨香之祭　直達到祢寶座前　</a:t>
-            </a:r>
-            <a:endParaRPr lang="en-US" altLang="zh-TW" sz="4800" b="1">
+              <a:t>獻上馨香之祭</a:t>
+            </a:r>
+            <a:r>
+              <a:rPr lang="zh-CN" altLang="en-US" sz="4800" b="1" dirty="0">
+                <a:solidFill>
+                  <a:srgbClr val="660033"/>
+                </a:solidFill>
+                <a:latin typeface="微軟正黑體" pitchFamily="34" charset="-120"/>
+                <a:ea typeface="微軟正黑體" pitchFamily="34" charset="-120"/>
+              </a:rPr>
+              <a:t>   </a:t>
+            </a:r>
+            <a:r>
+              <a:rPr lang="zh-TW" altLang="en-US" sz="4800" b="1" dirty="0">
+                <a:solidFill>
+                  <a:srgbClr val="660033"/>
+                </a:solidFill>
+                <a:latin typeface="微軟正黑體" pitchFamily="34" charset="-120"/>
+                <a:ea typeface="微軟正黑體" pitchFamily="34" charset="-120"/>
+              </a:rPr>
+              <a:t>直達到祢寶座前　</a:t>
+            </a:r>
+            <a:endParaRPr lang="en-US" altLang="zh-TW" sz="4800" b="1" dirty="0">
               <a:solidFill>
-                <a:schemeClr val="bg1"/>
+                <a:srgbClr val="660033"/>
               </a:solidFill>
-              <a:effectLst>
-                <a:glow rad="139700">
-                  <a:schemeClr val="accent6">
-                    <a:satMod val="175000"/>
-                    <a:alpha val="40000"/>
-                  </a:schemeClr>
-                </a:glow>
-              </a:effectLst>
               <a:latin typeface="微軟正黑體" pitchFamily="34" charset="-120"/>
               <a:ea typeface="微軟正黑體" pitchFamily="34" charset="-120"/>
             </a:endParaRPr>
@@ -3754,81 +3757,108 @@
               <a:buNone/>
             </a:pPr>
             <a:r>
-              <a:rPr lang="zh-TW" altLang="en-US" sz="4800" b="1" smtClean="0">
-                <a:solidFill>
-                  <a:schemeClr val="bg1"/>
-                </a:solidFill>
-                <a:effectLst>
-                  <a:glow rad="139700">
-                    <a:schemeClr val="accent6">
-                      <a:satMod val="175000"/>
-                      <a:alpha val="40000"/>
-                    </a:schemeClr>
-                  </a:glow>
-                </a:effectLst>
+              <a:rPr lang="zh-TW" altLang="en-US" sz="4800" b="1" dirty="0">
+                <a:solidFill>
+                  <a:srgbClr val="660033"/>
+                </a:solidFill>
                 <a:latin typeface="微軟正黑體" pitchFamily="34" charset="-120"/>
                 <a:ea typeface="微軟正黑體" pitchFamily="34" charset="-120"/>
               </a:rPr>
-              <a:t>因</a:t>
-            </a:r>
-            <a:r>
-              <a:rPr lang="zh-TW" altLang="en-US" sz="4800" b="1" dirty="0">
-                <a:solidFill>
-                  <a:schemeClr val="bg1"/>
-                </a:solidFill>
-                <a:effectLst>
-                  <a:glow rad="139700">
-                    <a:schemeClr val="accent6">
-                      <a:satMod val="175000"/>
-                      <a:alpha val="40000"/>
-                    </a:schemeClr>
-                  </a:glow>
-                </a:effectLst>
-                <a:latin typeface="微軟正黑體" pitchFamily="34" charset="-120"/>
-                <a:ea typeface="微軟正黑體" pitchFamily="34" charset="-120"/>
-              </a:rPr>
-              <a:t>祢信實　祢必垂聽每個呼求</a:t>
+              <a:t>因祢信實   祢必垂聽每個呼求</a:t>
             </a:r>
             <a:endParaRPr lang="en-US" altLang="zh-TW" sz="4800" b="1" dirty="0">
               <a:solidFill>
-                <a:schemeClr val="bg1"/>
+                <a:srgbClr val="660033"/>
               </a:solidFill>
-              <a:effectLst>
-                <a:glow rad="139700">
-                  <a:schemeClr val="accent6">
-                    <a:satMod val="175000"/>
-                    <a:alpha val="40000"/>
-                  </a:schemeClr>
-                </a:glow>
-              </a:effectLst>
               <a:latin typeface="微軟正黑體" pitchFamily="34" charset="-120"/>
               <a:ea typeface="微軟正黑體" pitchFamily="34" charset="-120"/>
             </a:endParaRPr>
           </a:p>
         </p:txBody>
       </p:sp>
+      <p:sp>
+        <p:nvSpPr>
+          <p:cNvPr id="2" name="TextBox 1">
+            <a:extLst>
+              <a:ext uri="{FF2B5EF4-FFF2-40B4-BE49-F238E27FC236}">
+                <a16:creationId xmlns:a16="http://schemas.microsoft.com/office/drawing/2014/main" id="{4FE2753F-141A-D171-BE8F-97ED95892031}"/>
+              </a:ext>
+            </a:extLst>
+          </p:cNvPr>
+          <p:cNvSpPr txBox="1"/>
+          <p:nvPr/>
+        </p:nvSpPr>
+        <p:spPr>
+          <a:xfrm>
+            <a:off x="0" y="3867895"/>
+            <a:ext cx="9144000" cy="461665"/>
+          </a:xfrm>
+          <a:prstGeom prst="rect">
+            <a:avLst/>
+          </a:prstGeom>
+          <a:noFill/>
+        </p:spPr>
+        <p:txBody>
+          <a:bodyPr wrap="square" rtlCol="0">
+            <a:spAutoFit/>
+          </a:bodyPr>
+          <a:lstStyle/>
+          <a:p>
+            <a:pPr algn="ctr"/>
+            <a:r>
+              <a:rPr lang="en-US" sz="2400" b="1" dirty="0">
+                <a:solidFill>
+                  <a:srgbClr val="660033"/>
+                </a:solidFill>
+                <a:latin typeface="Microsoft JhengHei" panose="020B0604030504040204" pitchFamily="34" charset="-120"/>
+                <a:ea typeface="Microsoft JhengHei" panose="020B0604030504040204" pitchFamily="34" charset="-120"/>
+              </a:rPr>
+              <a:t>( </a:t>
+            </a:r>
+            <a:r>
+              <a:rPr lang="zh-CN" altLang="en-US" sz="2400" b="1" dirty="0">
+                <a:solidFill>
+                  <a:srgbClr val="660033"/>
+                </a:solidFill>
+                <a:latin typeface="Microsoft JhengHei" panose="020B0604030504040204" pitchFamily="34" charset="-120"/>
+                <a:ea typeface="Microsoft JhengHei" panose="020B0604030504040204" pitchFamily="34" charset="-120"/>
+              </a:rPr>
+              <a:t>副歌</a:t>
+            </a:r>
+            <a:r>
+              <a:rPr lang="en-US" sz="2400" b="1" dirty="0">
+                <a:solidFill>
+                  <a:srgbClr val="660033"/>
+                </a:solidFill>
+                <a:latin typeface="Microsoft JhengHei" panose="020B0604030504040204" pitchFamily="34" charset="-120"/>
+                <a:ea typeface="Microsoft JhengHei" panose="020B0604030504040204" pitchFamily="34" charset="-120"/>
+              </a:rPr>
+              <a:t> )</a:t>
+            </a:r>
+            <a:endParaRPr lang="vi-VN" sz="2400" b="1" dirty="0">
+              <a:solidFill>
+                <a:srgbClr val="660033"/>
+              </a:solidFill>
+              <a:ea typeface="Microsoft JhengHei" panose="020B0604030504040204" pitchFamily="34" charset="-120"/>
+            </a:endParaRPr>
+          </a:p>
+        </p:txBody>
+      </p:sp>
     </p:spTree>
     <p:extLst>
       <p:ext uri="{BB962C8B-B14F-4D97-AF65-F5344CB8AC3E}">
-        <p14:creationId xmlns="" xmlns:p14="http://schemas.microsoft.com/office/powerpoint/2010/main" val="1099146365"/>
+        <p14:creationId xmlns:p14="http://schemas.microsoft.com/office/powerpoint/2010/main" val="1099146365"/>
       </p:ext>
     </p:extLst>
   </p:cSld>
   <p:clrMapOvr>
     <a:masterClrMapping/>
   </p:clrMapOvr>
-  <p:timing>
-    <p:tnLst>
-      <p:par>
-        <p:cTn id="1" dur="indefinite" restart="never" nodeType="tmRoot"/>
-      </p:par>
-    </p:tnLst>
-  </p:timing>
 </p:sld>
 </file>
 
 <file path=ppt/theme/theme1.xml><?xml version="1.0" encoding="utf-8"?>
-<a:theme xmlns:a="http://schemas.openxmlformats.org/drawingml/2006/main" name="Office 佈景主題">
+<a:theme xmlns:a="http://schemas.openxmlformats.org/drawingml/2006/main" name="Theme1">
   <a:themeElements>
     <a:clrScheme name="Office">
       <a:dk1>
@@ -4107,5 +4137,10 @@
   </a:themeElements>
   <a:objectDefaults/>
   <a:extraClrSchemeLst/>
+  <a:extLst>
+    <a:ext uri="{05A4C25C-085E-4340-85A3-A5531E510DB2}">
+      <thm15:themeFamily xmlns:thm15="http://schemas.microsoft.com/office/thememl/2012/main" name="Theme1" id="{384ED68F-161E-4EC5-AA47-8343C2AC128D}" vid="{FD3E678D-D6FA-4147-A139-1A6315ADEDC3}"/>
+    </a:ext>
+  </a:extLst>
 </a:theme>
 </file>